--- a/assets/pptx/catalog-548.pptx
+++ b/assets/pptx/catalog-548.pptx
@@ -3586,7 +3586,7 @@
                 <a:ea typeface="Ebrima"/>
                 <a:cs typeface="Ebrima"/>
               </a:rPr>
-              <a:t>ሁለት አፍ ካለው ሰይፍ ይልቅ የተሳለ ነው (2x)</a:t>
+              <a:t>ሁለት አፍ ካለው ሰይፍ ይልቅ የተሳለ ነው 2x</a:t>
             </a:r>
           </a:p>
           <a:p>
@@ -3640,7 +3640,7 @@
                 <a:ea typeface="Ebrima"/>
                 <a:cs typeface="Ebrima"/>
               </a:rPr>
-              <a:t>ሁለት አፍ ካለው ሰይፍ ይልቅ የተሳለ ነው (2x)</a:t>
+              <a:t>ሁለት አፍ ካለው ሰይፍ ይልቅ የተሳለ ነው 2x</a:t>
             </a:r>
           </a:p>
         </p:txBody>
@@ -3707,7 +3707,7 @@
                 <a:ea typeface="Ebrima"/>
                 <a:cs typeface="Ebrima"/>
               </a:rPr>
-              <a:t>የተሳለ ነው የተሳለ ነው (4x)</a:t>
+              <a:t>የተሳለ ነው የተሳለ ነው 4x</a:t>
             </a:r>
           </a:p>
         </p:txBody>
@@ -3810,7 +3810,7 @@
                 <a:ea typeface="Ebrima"/>
                 <a:cs typeface="Ebrima"/>
               </a:rPr>
-              <a:t>ሁለት አፍ ካለው ሰይፍ ይልቅ የተሳለ ነው (2x)</a:t>
+              <a:t>ሁለት አፍ ካለው ሰይፍ ይልቅ የተሳለ ነው 2x</a:t>
             </a:r>
           </a:p>
           <a:p>
@@ -3864,7 +3864,7 @@
                 <a:ea typeface="Ebrima"/>
                 <a:cs typeface="Ebrima"/>
               </a:rPr>
-              <a:t>ሁለት አፍ ካለው ሰይፍ ይልቅ የተሳለ ነው (2x)</a:t>
+              <a:t>ሁለት አፍ ካለው ሰይፍ ይልቅ የተሳለ ነው 2x</a:t>
             </a:r>
           </a:p>
         </p:txBody>
@@ -3931,7 +3931,7 @@
                 <a:ea typeface="Ebrima"/>
                 <a:cs typeface="Ebrima"/>
               </a:rPr>
-              <a:t>የተሳለ ነው የተሳለ ነው (4x)</a:t>
+              <a:t>የተሳለ ነው የተሳለ ነው 4x</a:t>
             </a:r>
           </a:p>
         </p:txBody>
